--- a/TelegramBot.pptx
+++ b/TelegramBot.pptx
@@ -21,6 +21,15 @@
     <p:sldId id="266" r:id="rId12"/>
     <p:sldId id="267" r:id="rId13"/>
     <p:sldId id="268" r:id="rId14"/>
+    <p:sldId id="269" r:id="rId20"/>
+    <p:sldId id="270" r:id="rId21"/>
+    <p:sldId id="271" r:id="rId22"/>
+    <p:sldId id="272" r:id="rId23"/>
+    <p:sldId id="273" r:id="rId24"/>
+    <p:sldId id="274" r:id="rId25"/>
+    <p:sldId id="275" r:id="rId26"/>
+    <p:sldId id="276" r:id="rId27"/>
+    <p:sldId id="277" r:id="rId28"/>
   </p:sldIdLst>
   <p:sldSz cx="12192000" cy="6858000"/>
   <p:notesSz cx="6858000" cy="12192000"/>
@@ -5713,6 +5722,1403 @@
 </p:sld>
 </file>
 
+<file path=ppt/slides/slide14.xml><?xml version="1.0" encoding="utf-8"?>
+<p:sld xmlns:a="http://schemas.openxmlformats.org/drawingml/2006/main" xmlns:p="http://schemas.openxmlformats.org/presentationml/2006/main" xmlns:r="http://schemas.openxmlformats.org/officeDocument/2006/relationships">
+  <p:cSld>
+    <p:bg>
+      <p:bgPr>
+        <a:solidFill>
+          <a:srgbClr val="1E2761"/>
+        </a:solidFill>
+        <a:effectLst/>
+      </p:bgPr>
+    </p:bg>
+    <p:spTree>
+      <p:nvGrpSpPr>
+        <p:cNvPr id="1" name=""/>
+        <p:cNvGrpSpPr/>
+        <p:nvPr/>
+      </p:nvGrpSpPr>
+      <p:grpSpPr/>
+      <p:sp>
+        <p:nvSpPr>
+          <p:cNvPr id="2" name="TextBox 1"/>
+          <p:cNvSpPr txBox="1"/>
+          <p:nvPr/>
+        </p:nvSpPr>
+        <p:spPr>
+          <a:xfrm>
+            <a:off x="822960" y="2377440"/>
+            <a:ext cx="10515600" cy="822960"/>
+          </a:xfrm>
+          <a:prstGeom prst="rect">
+            <a:avLst/>
+          </a:prstGeom>
+          <a:noFill/>
+        </p:spPr>
+        <p:txBody>
+          <a:bodyPr wrap="square" lIns="0" rIns="0" tIns="0" bIns="0">
+            <a:spAutoFit/>
+          </a:bodyPr>
+          <a:lstStyle/>
+          <a:p>
+            <a:pPr algn="l"/>
+            <a:r>
+              <a:rPr sz="4000" b="1" i="0">
+                <a:solidFill>
+                  <a:srgbClr val="FFFFFF"/>
+                </a:solidFill>
+                <a:latin typeface="Cambria"/>
+              </a:rPr>
+              <a:t>Как это выглядит в работе</a:t>
+            </a:r>
+          </a:p>
+        </p:txBody>
+      </p:sp>
+      <p:sp>
+        <p:nvSpPr>
+          <p:cNvPr id="3" name="TextBox 2"/>
+          <p:cNvSpPr txBox="1"/>
+          <p:nvPr/>
+        </p:nvSpPr>
+        <p:spPr>
+          <a:xfrm>
+            <a:off x="822960" y="3246120"/>
+            <a:ext cx="10515600" cy="457200"/>
+          </a:xfrm>
+          <a:prstGeom prst="rect">
+            <a:avLst/>
+          </a:prstGeom>
+          <a:noFill/>
+        </p:spPr>
+        <p:txBody>
+          <a:bodyPr wrap="square" lIns="0" rIns="0" tIns="0" bIns="0">
+            <a:spAutoFit/>
+          </a:bodyPr>
+          <a:lstStyle/>
+          <a:p>
+            <a:pPr algn="l"/>
+            <a:r>
+              <a:rPr sz="1900" b="0" i="0">
+                <a:solidFill>
+                  <a:srgbClr val="CADCFC"/>
+                </a:solidFill>
+                <a:latin typeface="Calibri"/>
+              </a:rPr>
+              <a:t>Живые экраны: Telegram-бот и приложение агента</a:t>
+            </a:r>
+          </a:p>
+        </p:txBody>
+      </p:sp>
+      <p:sp>
+        <p:nvSpPr>
+          <p:cNvPr id="4" name="TextBox 3"/>
+          <p:cNvSpPr txBox="1"/>
+          <p:nvPr/>
+        </p:nvSpPr>
+        <p:spPr>
+          <a:xfrm>
+            <a:off x="822960" y="3749039"/>
+            <a:ext cx="10515600" cy="365760"/>
+          </a:xfrm>
+          <a:prstGeom prst="rect">
+            <a:avLst/>
+          </a:prstGeom>
+          <a:noFill/>
+        </p:spPr>
+        <p:txBody>
+          <a:bodyPr wrap="square" lIns="0" rIns="0" tIns="0" bIns="0">
+            <a:spAutoFit/>
+          </a:bodyPr>
+          <a:lstStyle/>
+          <a:p>
+            <a:pPr algn="l"/>
+            <a:r>
+              <a:rPr sz="1300" b="0" i="1">
+                <a:solidFill>
+                  <a:srgbClr val="9FB3D9"/>
+                </a:solidFill>
+                <a:latin typeface="Calibri"/>
+              </a:rPr>
+              <a:t>Снимки сделаны на рабочей системе, данные настоящие</a:t>
+            </a:r>
+          </a:p>
+        </p:txBody>
+      </p:sp>
+    </p:spTree>
+  </p:cSld>
+  <p:clrMapOvr>
+    <a:masterClrMapping/>
+  </p:clrMapOvr>
+</p:sld>
+</file>
+
+<file path=ppt/slides/slide15.xml><?xml version="1.0" encoding="utf-8"?>
+<p:sld xmlns:a="http://schemas.openxmlformats.org/drawingml/2006/main" xmlns:p="http://schemas.openxmlformats.org/presentationml/2006/main" xmlns:r="http://schemas.openxmlformats.org/officeDocument/2006/relationships">
+  <p:cSld>
+    <p:spTree>
+      <p:nvGrpSpPr>
+        <p:cNvPr id="1" name=""/>
+        <p:cNvGrpSpPr/>
+        <p:nvPr/>
+      </p:nvGrpSpPr>
+      <p:grpSpPr/>
+      <p:sp>
+        <p:nvSpPr>
+          <p:cNvPr id="2" name="TextBox 1"/>
+          <p:cNvSpPr txBox="1"/>
+          <p:nvPr/>
+        </p:nvSpPr>
+        <p:spPr>
+          <a:xfrm>
+            <a:off x="640080" y="411480"/>
+            <a:ext cx="10881360" cy="685800"/>
+          </a:xfrm>
+          <a:prstGeom prst="rect">
+            <a:avLst/>
+          </a:prstGeom>
+          <a:noFill/>
+        </p:spPr>
+        <p:txBody>
+          <a:bodyPr wrap="square" lIns="0" rIns="0" tIns="0" bIns="0">
+            <a:spAutoFit/>
+          </a:bodyPr>
+          <a:lstStyle/>
+          <a:p>
+            <a:pPr algn="l"/>
+            <a:r>
+              <a:rPr sz="3200" b="1" i="0">
+                <a:solidFill>
+                  <a:srgbClr val="1E2761"/>
+                </a:solidFill>
+                <a:latin typeface="Cambria"/>
+              </a:rPr>
+              <a:t>Бот: вход и прикрепление точки</a:t>
+            </a:r>
+          </a:p>
+        </p:txBody>
+      </p:sp>
+      <p:sp>
+        <p:nvSpPr>
+          <p:cNvPr id="3" name="TextBox 2"/>
+          <p:cNvSpPr txBox="1"/>
+          <p:nvPr/>
+        </p:nvSpPr>
+        <p:spPr>
+          <a:xfrm>
+            <a:off x="640080" y="1097280"/>
+            <a:ext cx="10881360" cy="365760"/>
+          </a:xfrm>
+          <a:prstGeom prst="rect">
+            <a:avLst/>
+          </a:prstGeom>
+          <a:noFill/>
+        </p:spPr>
+        <p:txBody>
+          <a:bodyPr wrap="square" lIns="0" rIns="0" tIns="0" bIns="0">
+            <a:spAutoFit/>
+          </a:bodyPr>
+          <a:lstStyle/>
+          <a:p>
+            <a:pPr algn="l"/>
+            <a:r>
+              <a:rPr sz="1500" b="0" i="0">
+                <a:solidFill>
+                  <a:srgbClr val="5A6478"/>
+                </a:solidFill>
+                <a:latin typeface="Calibri"/>
+              </a:rPr>
+              <a:t>Агент вводит логин, затем ИНН — система сама находит точку в базе</a:t>
+            </a:r>
+          </a:p>
+        </p:txBody>
+      </p:sp>
+      <p:pic>
+        <p:nvPicPr>
+          <p:cNvPr id="4" name="Picture 3" descr="photo_1_2026-08-28_16-44-41.jpg"/>
+          <p:cNvPicPr>
+            <a:picLocks noChangeAspect="1"/>
+          </p:cNvPicPr>
+          <p:nvPr/>
+        </p:nvPicPr>
+        <p:blipFill>
+          <a:blip r:embed="rId2"/>
+          <a:stretch>
+            <a:fillRect/>
+          </a:stretch>
+        </p:blipFill>
+        <p:spPr>
+          <a:xfrm>
+            <a:off x="2646741" y="1691640"/>
+            <a:ext cx="1963209" cy="4251960"/>
+          </a:xfrm>
+          <a:prstGeom prst="rect">
+            <a:avLst/>
+          </a:prstGeom>
+        </p:spPr>
+      </p:pic>
+      <p:sp>
+        <p:nvSpPr>
+          <p:cNvPr id="5" name="TextBox 4"/>
+          <p:cNvSpPr txBox="1"/>
+          <p:nvPr/>
+        </p:nvSpPr>
+        <p:spPr>
+          <a:xfrm>
+            <a:off x="2395281" y="6089904"/>
+            <a:ext cx="2466129" cy="548640"/>
+          </a:xfrm>
+          <a:prstGeom prst="rect">
+            <a:avLst/>
+          </a:prstGeom>
+          <a:noFill/>
+        </p:spPr>
+        <p:txBody>
+          <a:bodyPr wrap="square" lIns="0" rIns="0" tIns="0" bIns="0">
+            <a:spAutoFit/>
+          </a:bodyPr>
+          <a:lstStyle/>
+          <a:p>
+            <a:pPr algn="ctr"/>
+            <a:r>
+              <a:rPr sz="1150" b="0" i="0">
+                <a:solidFill>
+                  <a:srgbClr val="5A6478"/>
+                </a:solidFill>
+                <a:latin typeface="Calibri"/>
+              </a:rPr>
+              <a:t>Вход по логину агента</a:t>
+            </a:r>
+          </a:p>
+        </p:txBody>
+      </p:sp>
+      <p:pic>
+        <p:nvPicPr>
+          <p:cNvPr id="6" name="Picture 5" descr="photo_2_2026-08-28_16-44-41.jpg"/>
+          <p:cNvPicPr>
+            <a:picLocks noChangeAspect="1"/>
+          </p:cNvPicPr>
+          <p:nvPr/>
+        </p:nvPicPr>
+        <p:blipFill>
+          <a:blip r:embed="rId3"/>
+          <a:stretch>
+            <a:fillRect/>
+          </a:stretch>
+        </p:blipFill>
+        <p:spPr>
+          <a:xfrm>
+            <a:off x="5112871" y="1691640"/>
+            <a:ext cx="1963209" cy="4251960"/>
+          </a:xfrm>
+          <a:prstGeom prst="rect">
+            <a:avLst/>
+          </a:prstGeom>
+        </p:spPr>
+      </p:pic>
+      <p:sp>
+        <p:nvSpPr>
+          <p:cNvPr id="7" name="TextBox 6"/>
+          <p:cNvSpPr txBox="1"/>
+          <p:nvPr/>
+        </p:nvSpPr>
+        <p:spPr>
+          <a:xfrm>
+            <a:off x="4861411" y="6089904"/>
+            <a:ext cx="2466129" cy="548640"/>
+          </a:xfrm>
+          <a:prstGeom prst="rect">
+            <a:avLst/>
+          </a:prstGeom>
+          <a:noFill/>
+        </p:spPr>
+        <p:txBody>
+          <a:bodyPr wrap="square" lIns="0" rIns="0" tIns="0" bIns="0">
+            <a:spAutoFit/>
+          </a:bodyPr>
+          <a:lstStyle/>
+          <a:p>
+            <a:pPr algn="ctr"/>
+            <a:r>
+              <a:rPr sz="1150" b="0" i="0">
+                <a:solidFill>
+                  <a:srgbClr val="5A6478"/>
+                </a:solidFill>
+                <a:latin typeface="Calibri"/>
+              </a:rPr>
+              <a:t>Точка найдена — выбор дней визита</a:t>
+            </a:r>
+          </a:p>
+        </p:txBody>
+      </p:sp>
+      <p:pic>
+        <p:nvPicPr>
+          <p:cNvPr id="8" name="Picture 7" descr="photo_3_2026-08-28_16-44-41.jpg"/>
+          <p:cNvPicPr>
+            <a:picLocks noChangeAspect="1"/>
+          </p:cNvPicPr>
+          <p:nvPr/>
+        </p:nvPicPr>
+        <p:blipFill>
+          <a:blip r:embed="rId4"/>
+          <a:stretch>
+            <a:fillRect/>
+          </a:stretch>
+        </p:blipFill>
+        <p:spPr>
+          <a:xfrm>
+            <a:off x="7579000" y="1691640"/>
+            <a:ext cx="1963209" cy="4251960"/>
+          </a:xfrm>
+          <a:prstGeom prst="rect">
+            <a:avLst/>
+          </a:prstGeom>
+        </p:spPr>
+      </p:pic>
+      <p:sp>
+        <p:nvSpPr>
+          <p:cNvPr id="9" name="TextBox 8"/>
+          <p:cNvSpPr txBox="1"/>
+          <p:nvPr/>
+        </p:nvSpPr>
+        <p:spPr>
+          <a:xfrm>
+            <a:off x="7327540" y="6089904"/>
+            <a:ext cx="2466129" cy="548640"/>
+          </a:xfrm>
+          <a:prstGeom prst="rect">
+            <a:avLst/>
+          </a:prstGeom>
+          <a:noFill/>
+        </p:spPr>
+        <p:txBody>
+          <a:bodyPr wrap="square" lIns="0" rIns="0" tIns="0" bIns="0">
+            <a:spAutoFit/>
+          </a:bodyPr>
+          <a:lstStyle/>
+          <a:p>
+            <a:pPr algn="ctr"/>
+            <a:r>
+              <a:rPr sz="1150" b="0" i="0">
+                <a:solidFill>
+                  <a:srgbClr val="5A6478"/>
+                </a:solidFill>
+                <a:latin typeface="Calibri"/>
+              </a:rPr>
+              <a:t>Проверка данных перед отправкой</a:t>
+            </a:r>
+          </a:p>
+        </p:txBody>
+      </p:sp>
+    </p:spTree>
+  </p:cSld>
+  <p:clrMapOvr>
+    <a:masterClrMapping/>
+  </p:clrMapOvr>
+</p:sld>
+</file>
+
+<file path=ppt/slides/slide16.xml><?xml version="1.0" encoding="utf-8"?>
+<p:sld xmlns:a="http://schemas.openxmlformats.org/drawingml/2006/main" xmlns:p="http://schemas.openxmlformats.org/presentationml/2006/main" xmlns:r="http://schemas.openxmlformats.org/officeDocument/2006/relationships">
+  <p:cSld>
+    <p:spTree>
+      <p:nvGrpSpPr>
+        <p:cNvPr id="1" name=""/>
+        <p:cNvGrpSpPr/>
+        <p:nvPr/>
+      </p:nvGrpSpPr>
+      <p:grpSpPr/>
+      <p:sp>
+        <p:nvSpPr>
+          <p:cNvPr id="2" name="TextBox 1"/>
+          <p:cNvSpPr txBox="1"/>
+          <p:nvPr/>
+        </p:nvSpPr>
+        <p:spPr>
+          <a:xfrm>
+            <a:off x="640080" y="411480"/>
+            <a:ext cx="10881360" cy="685800"/>
+          </a:xfrm>
+          <a:prstGeom prst="rect">
+            <a:avLst/>
+          </a:prstGeom>
+          <a:noFill/>
+        </p:spPr>
+        <p:txBody>
+          <a:bodyPr wrap="square" lIns="0" rIns="0" tIns="0" bIns="0">
+            <a:spAutoFit/>
+          </a:bodyPr>
+          <a:lstStyle/>
+          <a:p>
+            <a:pPr algn="l"/>
+            <a:r>
+              <a:rPr sz="3200" b="1" i="0">
+                <a:solidFill>
+                  <a:srgbClr val="1E2761"/>
+                </a:solidFill>
+                <a:latin typeface="Cambria"/>
+              </a:rPr>
+              <a:t>Бот: ошибиться не даёт</a:t>
+            </a:r>
+          </a:p>
+        </p:txBody>
+      </p:sp>
+      <p:sp>
+        <p:nvSpPr>
+          <p:cNvPr id="3" name="TextBox 2"/>
+          <p:cNvSpPr txBox="1"/>
+          <p:nvPr/>
+        </p:nvSpPr>
+        <p:spPr>
+          <a:xfrm>
+            <a:off x="640080" y="1097280"/>
+            <a:ext cx="10881360" cy="365760"/>
+          </a:xfrm>
+          <a:prstGeom prst="rect">
+            <a:avLst/>
+          </a:prstGeom>
+          <a:noFill/>
+        </p:spPr>
+        <p:txBody>
+          <a:bodyPr wrap="square" lIns="0" rIns="0" tIns="0" bIns="0">
+            <a:spAutoFit/>
+          </a:bodyPr>
+          <a:lstStyle/>
+          <a:p>
+            <a:pPr algn="l"/>
+            <a:r>
+              <a:rPr sz="1500" b="0" i="0">
+                <a:solidFill>
+                  <a:srgbClr val="5A6478"/>
+                </a:solidFill>
+                <a:latin typeface="Calibri"/>
+              </a:rPr>
+              <a:t>Правила и форматы проверяются на месте, а не после — при ручной сверке</a:t>
+            </a:r>
+          </a:p>
+        </p:txBody>
+      </p:sp>
+      <p:pic>
+        <p:nvPicPr>
+          <p:cNvPr id="4" name="Picture 3" descr="photo_4_2026-08-28_16-44-41.jpg"/>
+          <p:cNvPicPr>
+            <a:picLocks noChangeAspect="1"/>
+          </p:cNvPicPr>
+          <p:nvPr/>
+        </p:nvPicPr>
+        <p:blipFill>
+          <a:blip r:embed="rId2"/>
+          <a:stretch>
+            <a:fillRect/>
+          </a:stretch>
+        </p:blipFill>
+        <p:spPr>
+          <a:xfrm>
+            <a:off x="2646741" y="1691640"/>
+            <a:ext cx="1963209" cy="4251960"/>
+          </a:xfrm>
+          <a:prstGeom prst="rect">
+            <a:avLst/>
+          </a:prstGeom>
+        </p:spPr>
+      </p:pic>
+      <p:sp>
+        <p:nvSpPr>
+          <p:cNvPr id="5" name="TextBox 4"/>
+          <p:cNvSpPr txBox="1"/>
+          <p:nvPr/>
+        </p:nvSpPr>
+        <p:spPr>
+          <a:xfrm>
+            <a:off x="2395281" y="6089904"/>
+            <a:ext cx="2466129" cy="548640"/>
+          </a:xfrm>
+          <a:prstGeom prst="rect">
+            <a:avLst/>
+          </a:prstGeom>
+          <a:noFill/>
+        </p:spPr>
+        <p:txBody>
+          <a:bodyPr wrap="square" lIns="0" rIns="0" tIns="0" bIns="0">
+            <a:spAutoFit/>
+          </a:bodyPr>
+          <a:lstStyle/>
+          <a:p>
+            <a:pPr algn="ctr"/>
+            <a:r>
+              <a:rPr sz="1150" b="0" i="0">
+                <a:solidFill>
+                  <a:srgbClr val="5A6478"/>
+                </a:solidFill>
+                <a:latin typeface="Calibri"/>
+              </a:rPr>
+              <a:t>Точка занята агентом того же бренда</a:t>
+            </a:r>
+          </a:p>
+        </p:txBody>
+      </p:sp>
+      <p:pic>
+        <p:nvPicPr>
+          <p:cNvPr id="6" name="Picture 5" descr="photo_5_2026-08-28_16-44-41.jpg"/>
+          <p:cNvPicPr>
+            <a:picLocks noChangeAspect="1"/>
+          </p:cNvPicPr>
+          <p:nvPr/>
+        </p:nvPicPr>
+        <p:blipFill>
+          <a:blip r:embed="rId3"/>
+          <a:stretch>
+            <a:fillRect/>
+          </a:stretch>
+        </p:blipFill>
+        <p:spPr>
+          <a:xfrm>
+            <a:off x="5112871" y="1691640"/>
+            <a:ext cx="1963209" cy="4251960"/>
+          </a:xfrm>
+          <a:prstGeom prst="rect">
+            <a:avLst/>
+          </a:prstGeom>
+        </p:spPr>
+      </p:pic>
+      <p:sp>
+        <p:nvSpPr>
+          <p:cNvPr id="7" name="TextBox 6"/>
+          <p:cNvSpPr txBox="1"/>
+          <p:nvPr/>
+        </p:nvSpPr>
+        <p:spPr>
+          <a:xfrm>
+            <a:off x="4861411" y="6089904"/>
+            <a:ext cx="2466129" cy="548640"/>
+          </a:xfrm>
+          <a:prstGeom prst="rect">
+            <a:avLst/>
+          </a:prstGeom>
+          <a:noFill/>
+        </p:spPr>
+        <p:txBody>
+          <a:bodyPr wrap="square" lIns="0" rIns="0" tIns="0" bIns="0">
+            <a:spAutoFit/>
+          </a:bodyPr>
+          <a:lstStyle/>
+          <a:p>
+            <a:pPr algn="ctr"/>
+            <a:r>
+              <a:rPr sz="1150" b="0" i="0">
+                <a:solidFill>
+                  <a:srgbClr val="5A6478"/>
+                </a:solidFill>
+                <a:latin typeface="Calibri"/>
+              </a:rPr>
+              <a:t>ИНН только 9 или 14 цифр</a:t>
+            </a:r>
+          </a:p>
+        </p:txBody>
+      </p:sp>
+      <p:pic>
+        <p:nvPicPr>
+          <p:cNvPr id="8" name="Picture 7" descr="photo_6_2026-08-28_16-44-41.jpg"/>
+          <p:cNvPicPr>
+            <a:picLocks noChangeAspect="1"/>
+          </p:cNvPicPr>
+          <p:nvPr/>
+        </p:nvPicPr>
+        <p:blipFill>
+          <a:blip r:embed="rId4"/>
+          <a:stretch>
+            <a:fillRect/>
+          </a:stretch>
+        </p:blipFill>
+        <p:spPr>
+          <a:xfrm>
+            <a:off x="7579000" y="1691640"/>
+            <a:ext cx="1963209" cy="4251960"/>
+          </a:xfrm>
+          <a:prstGeom prst="rect">
+            <a:avLst/>
+          </a:prstGeom>
+        </p:spPr>
+      </p:pic>
+      <p:sp>
+        <p:nvSpPr>
+          <p:cNvPr id="9" name="TextBox 8"/>
+          <p:cNvSpPr txBox="1"/>
+          <p:nvPr/>
+        </p:nvSpPr>
+        <p:spPr>
+          <a:xfrm>
+            <a:off x="7327540" y="6089904"/>
+            <a:ext cx="2466129" cy="548640"/>
+          </a:xfrm>
+          <a:prstGeom prst="rect">
+            <a:avLst/>
+          </a:prstGeom>
+          <a:noFill/>
+        </p:spPr>
+        <p:txBody>
+          <a:bodyPr wrap="square" lIns="0" rIns="0" tIns="0" bIns="0">
+            <a:spAutoFit/>
+          </a:bodyPr>
+          <a:lstStyle/>
+          <a:p>
+            <a:pPr algn="ctr"/>
+            <a:r>
+              <a:rPr sz="1150" b="0" i="0">
+                <a:solidFill>
+                  <a:srgbClr val="5A6478"/>
+                </a:solidFill>
+                <a:latin typeface="Calibri"/>
+              </a:rPr>
+              <a:t>Похожее название уже есть в базе</a:t>
+            </a:r>
+          </a:p>
+        </p:txBody>
+      </p:sp>
+    </p:spTree>
+  </p:cSld>
+  <p:clrMapOvr>
+    <a:masterClrMapping/>
+  </p:clrMapOvr>
+</p:sld>
+</file>
+
+<file path=ppt/slides/slide17.xml><?xml version="1.0" encoding="utf-8"?>
+<p:sld xmlns:a="http://schemas.openxmlformats.org/drawingml/2006/main" xmlns:p="http://schemas.openxmlformats.org/presentationml/2006/main" xmlns:r="http://schemas.openxmlformats.org/officeDocument/2006/relationships">
+  <p:cSld>
+    <p:spTree>
+      <p:nvGrpSpPr>
+        <p:cNvPr id="1" name=""/>
+        <p:cNvGrpSpPr/>
+        <p:nvPr/>
+      </p:nvGrpSpPr>
+      <p:grpSpPr/>
+      <p:sp>
+        <p:nvSpPr>
+          <p:cNvPr id="2" name="TextBox 1"/>
+          <p:cNvSpPr txBox="1"/>
+          <p:nvPr/>
+        </p:nvSpPr>
+        <p:spPr>
+          <a:xfrm>
+            <a:off x="640080" y="411480"/>
+            <a:ext cx="10881360" cy="685800"/>
+          </a:xfrm>
+          <a:prstGeom prst="rect">
+            <a:avLst/>
+          </a:prstGeom>
+          <a:noFill/>
+        </p:spPr>
+        <p:txBody>
+          <a:bodyPr wrap="square" lIns="0" rIns="0" tIns="0" bIns="0">
+            <a:spAutoFit/>
+          </a:bodyPr>
+          <a:lstStyle/>
+          <a:p>
+            <a:pPr algn="l"/>
+            <a:r>
+              <a:rPr sz="3200" b="1" i="0">
+                <a:solidFill>
+                  <a:srgbClr val="1E2761"/>
+                </a:solidFill>
+                <a:latin typeface="Cambria"/>
+              </a:rPr>
+              <a:t>Бот: регистрация новой точки</a:t>
+            </a:r>
+          </a:p>
+        </p:txBody>
+      </p:sp>
+      <p:sp>
+        <p:nvSpPr>
+          <p:cNvPr id="3" name="TextBox 2"/>
+          <p:cNvSpPr txBox="1"/>
+          <p:nvPr/>
+        </p:nvSpPr>
+        <p:spPr>
+          <a:xfrm>
+            <a:off x="640080" y="1097280"/>
+            <a:ext cx="10881360" cy="365760"/>
+          </a:xfrm>
+          <a:prstGeom prst="rect">
+            <a:avLst/>
+          </a:prstGeom>
+          <a:noFill/>
+        </p:spPr>
+        <p:txBody>
+          <a:bodyPr wrap="square" lIns="0" rIns="0" tIns="0" bIns="0">
+            <a:spAutoFit/>
+          </a:bodyPr>
+          <a:lstStyle/>
+          <a:p>
+            <a:pPr algn="l"/>
+            <a:r>
+              <a:rPr sz="1500" b="0" i="0">
+                <a:solidFill>
+                  <a:srgbClr val="5A6478"/>
+                </a:solidFill>
+                <a:latin typeface="Calibri"/>
+              </a:rPr>
+              <a:t>Если точки нет в базе, агент заводит её по шагам — без свободного ввода</a:t>
+            </a:r>
+          </a:p>
+        </p:txBody>
+      </p:sp>
+      <p:pic>
+        <p:nvPicPr>
+          <p:cNvPr id="4" name="Picture 3" descr="photo_7_2026-08-28_16-44-41.jpg"/>
+          <p:cNvPicPr>
+            <a:picLocks noChangeAspect="1"/>
+          </p:cNvPicPr>
+          <p:nvPr/>
+        </p:nvPicPr>
+        <p:blipFill>
+          <a:blip r:embed="rId2"/>
+          <a:stretch>
+            <a:fillRect/>
+          </a:stretch>
+        </p:blipFill>
+        <p:spPr>
+          <a:xfrm>
+            <a:off x="2646741" y="1691640"/>
+            <a:ext cx="1963209" cy="4251960"/>
+          </a:xfrm>
+          <a:prstGeom prst="rect">
+            <a:avLst/>
+          </a:prstGeom>
+        </p:spPr>
+      </p:pic>
+      <p:sp>
+        <p:nvSpPr>
+          <p:cNvPr id="5" name="TextBox 4"/>
+          <p:cNvSpPr txBox="1"/>
+          <p:nvPr/>
+        </p:nvSpPr>
+        <p:spPr>
+          <a:xfrm>
+            <a:off x="2395281" y="6089904"/>
+            <a:ext cx="2466129" cy="548640"/>
+          </a:xfrm>
+          <a:prstGeom prst="rect">
+            <a:avLst/>
+          </a:prstGeom>
+          <a:noFill/>
+        </p:spPr>
+        <p:txBody>
+          <a:bodyPr wrap="square" lIns="0" rIns="0" tIns="0" bIns="0">
+            <a:spAutoFit/>
+          </a:bodyPr>
+          <a:lstStyle/>
+          <a:p>
+            <a:pPr algn="ctr"/>
+            <a:r>
+              <a:rPr sz="1150" b="0" i="0">
+                <a:solidFill>
+                  <a:srgbClr val="5A6478"/>
+                </a:solidFill>
+                <a:latin typeface="Calibri"/>
+              </a:rPr>
+              <a:t>Геометка с карты</a:t>
+            </a:r>
+          </a:p>
+        </p:txBody>
+      </p:sp>
+      <p:pic>
+        <p:nvPicPr>
+          <p:cNvPr id="6" name="Picture 5" descr="photo_8_2026-08-28_16-44-41.jpg"/>
+          <p:cNvPicPr>
+            <a:picLocks noChangeAspect="1"/>
+          </p:cNvPicPr>
+          <p:nvPr/>
+        </p:nvPicPr>
+        <p:blipFill>
+          <a:blip r:embed="rId3"/>
+          <a:stretch>
+            <a:fillRect/>
+          </a:stretch>
+        </p:blipFill>
+        <p:spPr>
+          <a:xfrm>
+            <a:off x="5112871" y="1691640"/>
+            <a:ext cx="1963209" cy="4251960"/>
+          </a:xfrm>
+          <a:prstGeom prst="rect">
+            <a:avLst/>
+          </a:prstGeom>
+        </p:spPr>
+      </p:pic>
+      <p:sp>
+        <p:nvSpPr>
+          <p:cNvPr id="7" name="TextBox 6"/>
+          <p:cNvSpPr txBox="1"/>
+          <p:nvPr/>
+        </p:nvSpPr>
+        <p:spPr>
+          <a:xfrm>
+            <a:off x="4861411" y="6089904"/>
+            <a:ext cx="2466129" cy="548640"/>
+          </a:xfrm>
+          <a:prstGeom prst="rect">
+            <a:avLst/>
+          </a:prstGeom>
+          <a:noFill/>
+        </p:spPr>
+        <p:txBody>
+          <a:bodyPr wrap="square" lIns="0" rIns="0" tIns="0" bIns="0">
+            <a:spAutoFit/>
+          </a:bodyPr>
+          <a:lstStyle/>
+          <a:p>
+            <a:pPr algn="ctr"/>
+            <a:r>
+              <a:rPr sz="1150" b="0" i="0">
+                <a:solidFill>
+                  <a:srgbClr val="5A6478"/>
+                </a:solidFill>
+                <a:latin typeface="Calibri"/>
+              </a:rPr>
+              <a:t>Регион и область</a:t>
+            </a:r>
+          </a:p>
+        </p:txBody>
+      </p:sp>
+      <p:pic>
+        <p:nvPicPr>
+          <p:cNvPr id="8" name="Picture 7" descr="photo_9_2026-08-28_16-44-41.jpg"/>
+          <p:cNvPicPr>
+            <a:picLocks noChangeAspect="1"/>
+          </p:cNvPicPr>
+          <p:nvPr/>
+        </p:nvPicPr>
+        <p:blipFill>
+          <a:blip r:embed="rId4"/>
+          <a:stretch>
+            <a:fillRect/>
+          </a:stretch>
+        </p:blipFill>
+        <p:spPr>
+          <a:xfrm>
+            <a:off x="7579000" y="1691640"/>
+            <a:ext cx="1963209" cy="4251960"/>
+          </a:xfrm>
+          <a:prstGeom prst="rect">
+            <a:avLst/>
+          </a:prstGeom>
+        </p:spPr>
+      </p:pic>
+      <p:sp>
+        <p:nvSpPr>
+          <p:cNvPr id="9" name="TextBox 8"/>
+          <p:cNvSpPr txBox="1"/>
+          <p:nvPr/>
+        </p:nvSpPr>
+        <p:spPr>
+          <a:xfrm>
+            <a:off x="7327540" y="6089904"/>
+            <a:ext cx="2466129" cy="548640"/>
+          </a:xfrm>
+          <a:prstGeom prst="rect">
+            <a:avLst/>
+          </a:prstGeom>
+          <a:noFill/>
+        </p:spPr>
+        <p:txBody>
+          <a:bodyPr wrap="square" lIns="0" rIns="0" tIns="0" bIns="0">
+            <a:spAutoFit/>
+          </a:bodyPr>
+          <a:lstStyle/>
+          <a:p>
+            <a:pPr algn="ctr"/>
+            <a:r>
+              <a:rPr sz="1150" b="0" i="0">
+                <a:solidFill>
+                  <a:srgbClr val="5A6478"/>
+                </a:solidFill>
+                <a:latin typeface="Calibri"/>
+              </a:rPr>
+              <a:t>Округ по выбранной области</a:t>
+            </a:r>
+          </a:p>
+        </p:txBody>
+      </p:sp>
+    </p:spTree>
+  </p:cSld>
+  <p:clrMapOvr>
+    <a:masterClrMapping/>
+  </p:clrMapOvr>
+</p:sld>
+</file>
+
+<file path=ppt/slides/slide18.xml><?xml version="1.0" encoding="utf-8"?>
+<p:sld xmlns:a="http://schemas.openxmlformats.org/drawingml/2006/main" xmlns:p="http://schemas.openxmlformats.org/presentationml/2006/main" xmlns:r="http://schemas.openxmlformats.org/officeDocument/2006/relationships">
+  <p:cSld>
+    <p:spTree>
+      <p:nvGrpSpPr>
+        <p:cNvPr id="1" name=""/>
+        <p:cNvGrpSpPr/>
+        <p:nvPr/>
+      </p:nvGrpSpPr>
+      <p:grpSpPr/>
+      <p:sp>
+        <p:nvSpPr>
+          <p:cNvPr id="2" name="TextBox 1"/>
+          <p:cNvSpPr txBox="1"/>
+          <p:nvPr/>
+        </p:nvSpPr>
+        <p:spPr>
+          <a:xfrm>
+            <a:off x="640080" y="411480"/>
+            <a:ext cx="10881360" cy="685800"/>
+          </a:xfrm>
+          <a:prstGeom prst="rect">
+            <a:avLst/>
+          </a:prstGeom>
+          <a:noFill/>
+        </p:spPr>
+        <p:txBody>
+          <a:bodyPr wrap="square" lIns="0" rIns="0" tIns="0" bIns="0">
+            <a:spAutoFit/>
+          </a:bodyPr>
+          <a:lstStyle/>
+          <a:p>
+            <a:pPr algn="l"/>
+            <a:r>
+              <a:rPr sz="3200" b="1" i="0">
+                <a:solidFill>
+                  <a:srgbClr val="1E2761"/>
+                </a:solidFill>
+                <a:latin typeface="Cambria"/>
+              </a:rPr>
+              <a:t>Бот: справочники вместо ручного ввода</a:t>
+            </a:r>
+          </a:p>
+        </p:txBody>
+      </p:sp>
+      <p:sp>
+        <p:nvSpPr>
+          <p:cNvPr id="3" name="TextBox 2"/>
+          <p:cNvSpPr txBox="1"/>
+          <p:nvPr/>
+        </p:nvSpPr>
+        <p:spPr>
+          <a:xfrm>
+            <a:off x="640080" y="1097280"/>
+            <a:ext cx="10881360" cy="365760"/>
+          </a:xfrm>
+          <a:prstGeom prst="rect">
+            <a:avLst/>
+          </a:prstGeom>
+          <a:noFill/>
+        </p:spPr>
+        <p:txBody>
+          <a:bodyPr wrap="square" lIns="0" rIns="0" tIns="0" bIns="0">
+            <a:spAutoFit/>
+          </a:bodyPr>
+          <a:lstStyle/>
+          <a:p>
+            <a:pPr algn="l"/>
+            <a:r>
+              <a:rPr sz="1500" b="0" i="0">
+                <a:solidFill>
+                  <a:srgbClr val="5A6478"/>
+                </a:solidFill>
+                <a:latin typeface="Calibri"/>
+              </a:rPr>
+              <a:t>Формат, канал, тип, категория и код доставщика подставляются кнопками</a:t>
+            </a:r>
+          </a:p>
+        </p:txBody>
+      </p:sp>
+      <p:pic>
+        <p:nvPicPr>
+          <p:cNvPr id="4" name="Picture 3" descr="photo_10_2026-08-28_16-44-41.jpg"/>
+          <p:cNvPicPr>
+            <a:picLocks noChangeAspect="1"/>
+          </p:cNvPicPr>
+          <p:nvPr/>
+        </p:nvPicPr>
+        <p:blipFill>
+          <a:blip r:embed="rId2"/>
+          <a:stretch>
+            <a:fillRect/>
+          </a:stretch>
+        </p:blipFill>
+        <p:spPr>
+          <a:xfrm>
+            <a:off x="2646741" y="1691640"/>
+            <a:ext cx="1963209" cy="4251960"/>
+          </a:xfrm>
+          <a:prstGeom prst="rect">
+            <a:avLst/>
+          </a:prstGeom>
+        </p:spPr>
+      </p:pic>
+      <p:sp>
+        <p:nvSpPr>
+          <p:cNvPr id="5" name="TextBox 4"/>
+          <p:cNvSpPr txBox="1"/>
+          <p:nvPr/>
+        </p:nvSpPr>
+        <p:spPr>
+          <a:xfrm>
+            <a:off x="2395281" y="6089904"/>
+            <a:ext cx="2466129" cy="548640"/>
+          </a:xfrm>
+          <a:prstGeom prst="rect">
+            <a:avLst/>
+          </a:prstGeom>
+          <a:noFill/>
+        </p:spPr>
+        <p:txBody>
+          <a:bodyPr wrap="square" lIns="0" rIns="0" tIns="0" bIns="0">
+            <a:spAutoFit/>
+          </a:bodyPr>
+          <a:lstStyle/>
+          <a:p>
+            <a:pPr algn="ctr"/>
+            <a:r>
+              <a:rPr sz="1150" b="0" i="0">
+                <a:solidFill>
+                  <a:srgbClr val="5A6478"/>
+                </a:solidFill>
+                <a:latin typeface="Calibri"/>
+              </a:rPr>
+              <a:t>Формат торговой точки</a:t>
+            </a:r>
+          </a:p>
+        </p:txBody>
+      </p:sp>
+      <p:pic>
+        <p:nvPicPr>
+          <p:cNvPr id="6" name="Picture 5" descr="photo_14_2026-08-28_16-44-41.jpg"/>
+          <p:cNvPicPr>
+            <a:picLocks noChangeAspect="1"/>
+          </p:cNvPicPr>
+          <p:nvPr/>
+        </p:nvPicPr>
+        <p:blipFill>
+          <a:blip r:embed="rId3"/>
+          <a:stretch>
+            <a:fillRect/>
+          </a:stretch>
+        </p:blipFill>
+        <p:spPr>
+          <a:xfrm>
+            <a:off x="5112871" y="1691640"/>
+            <a:ext cx="1963209" cy="4251960"/>
+          </a:xfrm>
+          <a:prstGeom prst="rect">
+            <a:avLst/>
+          </a:prstGeom>
+        </p:spPr>
+      </p:pic>
+      <p:sp>
+        <p:nvSpPr>
+          <p:cNvPr id="7" name="TextBox 6"/>
+          <p:cNvSpPr txBox="1"/>
+          <p:nvPr/>
+        </p:nvSpPr>
+        <p:spPr>
+          <a:xfrm>
+            <a:off x="4861411" y="6089904"/>
+            <a:ext cx="2466129" cy="548640"/>
+          </a:xfrm>
+          <a:prstGeom prst="rect">
+            <a:avLst/>
+          </a:prstGeom>
+          <a:noFill/>
+        </p:spPr>
+        <p:txBody>
+          <a:bodyPr wrap="square" lIns="0" rIns="0" tIns="0" bIns="0">
+            <a:spAutoFit/>
+          </a:bodyPr>
+          <a:lstStyle/>
+          <a:p>
+            <a:pPr algn="ctr"/>
+            <a:r>
+              <a:rPr sz="1150" b="0" i="0">
+                <a:solidFill>
+                  <a:srgbClr val="5A6478"/>
+                </a:solidFill>
+                <a:latin typeface="Calibri"/>
+              </a:rPr>
+              <a:t>Код доставщика по области</a:t>
+            </a:r>
+          </a:p>
+        </p:txBody>
+      </p:sp>
+      <p:pic>
+        <p:nvPicPr>
+          <p:cNvPr id="8" name="Picture 7" descr="photo_15_2026-08-28_16-44-41.jpg"/>
+          <p:cNvPicPr>
+            <a:picLocks noChangeAspect="1"/>
+          </p:cNvPicPr>
+          <p:nvPr/>
+        </p:nvPicPr>
+        <p:blipFill>
+          <a:blip r:embed="rId4"/>
+          <a:stretch>
+            <a:fillRect/>
+          </a:stretch>
+        </p:blipFill>
+        <p:spPr>
+          <a:xfrm>
+            <a:off x="7579000" y="1691640"/>
+            <a:ext cx="1963209" cy="4251960"/>
+          </a:xfrm>
+          <a:prstGeom prst="rect">
+            <a:avLst/>
+          </a:prstGeom>
+        </p:spPr>
+      </p:pic>
+      <p:sp>
+        <p:nvSpPr>
+          <p:cNvPr id="9" name="TextBox 8"/>
+          <p:cNvSpPr txBox="1"/>
+          <p:nvPr/>
+        </p:nvSpPr>
+        <p:spPr>
+          <a:xfrm>
+            <a:off x="7327540" y="6089904"/>
+            <a:ext cx="2466129" cy="548640"/>
+          </a:xfrm>
+          <a:prstGeom prst="rect">
+            <a:avLst/>
+          </a:prstGeom>
+          <a:noFill/>
+        </p:spPr>
+        <p:txBody>
+          <a:bodyPr wrap="square" lIns="0" rIns="0" tIns="0" bIns="0">
+            <a:spAutoFit/>
+          </a:bodyPr>
+          <a:lstStyle/>
+          <a:p>
+            <a:pPr algn="ctr"/>
+            <a:r>
+              <a:rPr sz="1150" b="0" i="0">
+                <a:solidFill>
+                  <a:srgbClr val="5A6478"/>
+                </a:solidFill>
+                <a:latin typeface="Calibri"/>
+              </a:rPr>
+              <a:t>Дни визита, максимум три</a:t>
+            </a:r>
+          </a:p>
+        </p:txBody>
+      </p:sp>
+    </p:spTree>
+  </p:cSld>
+  <p:clrMapOvr>
+    <a:masterClrMapping/>
+  </p:clrMapOvr>
+</p:sld>
+</file>
+
+<file path=ppt/slides/slide19.xml><?xml version="1.0" encoding="utf-8"?>
+<p:sld xmlns:a="http://schemas.openxmlformats.org/drawingml/2006/main" xmlns:p="http://schemas.openxmlformats.org/presentationml/2006/main" xmlns:r="http://schemas.openxmlformats.org/officeDocument/2006/relationships">
+  <p:cSld>
+    <p:spTree>
+      <p:nvGrpSpPr>
+        <p:cNvPr id="1" name=""/>
+        <p:cNvGrpSpPr/>
+        <p:nvPr/>
+      </p:nvGrpSpPr>
+      <p:grpSpPr/>
+      <p:sp>
+        <p:nvSpPr>
+          <p:cNvPr id="2" name="TextBox 1"/>
+          <p:cNvSpPr txBox="1"/>
+          <p:nvPr/>
+        </p:nvSpPr>
+        <p:spPr>
+          <a:xfrm>
+            <a:off x="640080" y="411480"/>
+            <a:ext cx="10881360" cy="685800"/>
+          </a:xfrm>
+          <a:prstGeom prst="rect">
+            <a:avLst/>
+          </a:prstGeom>
+          <a:noFill/>
+        </p:spPr>
+        <p:txBody>
+          <a:bodyPr wrap="square" lIns="0" rIns="0" tIns="0" bIns="0">
+            <a:spAutoFit/>
+          </a:bodyPr>
+          <a:lstStyle/>
+          <a:p>
+            <a:pPr algn="l"/>
+            <a:r>
+              <a:rPr sz="3200" b="1" i="0">
+                <a:solidFill>
+                  <a:srgbClr val="1E2761"/>
+                </a:solidFill>
+                <a:latin typeface="Cambria"/>
+              </a:rPr>
+              <a:t>Бот: заявка уходит администратору</a:t>
+            </a:r>
+          </a:p>
+        </p:txBody>
+      </p:sp>
+      <p:sp>
+        <p:nvSpPr>
+          <p:cNvPr id="3" name="TextBox 2"/>
+          <p:cNvSpPr txBox="1"/>
+          <p:nvPr/>
+        </p:nvSpPr>
+        <p:spPr>
+          <a:xfrm>
+            <a:off x="640080" y="1097280"/>
+            <a:ext cx="10881360" cy="365760"/>
+          </a:xfrm>
+          <a:prstGeom prst="rect">
+            <a:avLst/>
+          </a:prstGeom>
+          <a:noFill/>
+        </p:spPr>
+        <p:txBody>
+          <a:bodyPr wrap="square" lIns="0" rIns="0" tIns="0" bIns="0">
+            <a:spAutoFit/>
+          </a:bodyPr>
+          <a:lstStyle/>
+          <a:p>
+            <a:pPr algn="l"/>
+            <a:r>
+              <a:rPr sz="1500" b="0" i="0">
+                <a:solidFill>
+                  <a:srgbClr val="5A6478"/>
+                </a:solidFill>
+                <a:latin typeface="Calibri"/>
+              </a:rPr>
+              <a:t>Агент видит карточку целиком перед отправкой — администратор получает её в Telegram</a:t>
+            </a:r>
+          </a:p>
+        </p:txBody>
+      </p:sp>
+      <p:pic>
+        <p:nvPicPr>
+          <p:cNvPr id="4" name="Picture 3" descr="photo_17_2026-08-28_16-44-41.jpg"/>
+          <p:cNvPicPr>
+            <a:picLocks noChangeAspect="1"/>
+          </p:cNvPicPr>
+          <p:nvPr/>
+        </p:nvPicPr>
+        <p:blipFill>
+          <a:blip r:embed="rId2"/>
+          <a:stretch>
+            <a:fillRect/>
+          </a:stretch>
+        </p:blipFill>
+        <p:spPr>
+          <a:xfrm>
+            <a:off x="3879806" y="1691640"/>
+            <a:ext cx="1963209" cy="4251960"/>
+          </a:xfrm>
+          <a:prstGeom prst="rect">
+            <a:avLst/>
+          </a:prstGeom>
+        </p:spPr>
+      </p:pic>
+      <p:sp>
+        <p:nvSpPr>
+          <p:cNvPr id="5" name="TextBox 4"/>
+          <p:cNvSpPr txBox="1"/>
+          <p:nvPr/>
+        </p:nvSpPr>
+        <p:spPr>
+          <a:xfrm>
+            <a:off x="3628346" y="6089904"/>
+            <a:ext cx="2466129" cy="548640"/>
+          </a:xfrm>
+          <a:prstGeom prst="rect">
+            <a:avLst/>
+          </a:prstGeom>
+          <a:noFill/>
+        </p:spPr>
+        <p:txBody>
+          <a:bodyPr wrap="square" lIns="0" rIns="0" tIns="0" bIns="0">
+            <a:spAutoFit/>
+          </a:bodyPr>
+          <a:lstStyle/>
+          <a:p>
+            <a:pPr algn="ctr"/>
+            <a:r>
+              <a:rPr sz="1150" b="0" i="0">
+                <a:solidFill>
+                  <a:srgbClr val="5A6478"/>
+                </a:solidFill>
+                <a:latin typeface="Calibri"/>
+              </a:rPr>
+              <a:t>Проверка перед отправкой</a:t>
+            </a:r>
+          </a:p>
+        </p:txBody>
+      </p:sp>
+      <p:pic>
+        <p:nvPicPr>
+          <p:cNvPr id="6" name="Picture 5" descr="photo_18_2026-08-28_16-44-41.jpg"/>
+          <p:cNvPicPr>
+            <a:picLocks noChangeAspect="1"/>
+          </p:cNvPicPr>
+          <p:nvPr/>
+        </p:nvPicPr>
+        <p:blipFill>
+          <a:blip r:embed="rId3"/>
+          <a:stretch>
+            <a:fillRect/>
+          </a:stretch>
+        </p:blipFill>
+        <p:spPr>
+          <a:xfrm>
+            <a:off x="6345936" y="1691640"/>
+            <a:ext cx="1963209" cy="4251960"/>
+          </a:xfrm>
+          <a:prstGeom prst="rect">
+            <a:avLst/>
+          </a:prstGeom>
+        </p:spPr>
+      </p:pic>
+      <p:sp>
+        <p:nvSpPr>
+          <p:cNvPr id="7" name="TextBox 6"/>
+          <p:cNvSpPr txBox="1"/>
+          <p:nvPr/>
+        </p:nvSpPr>
+        <p:spPr>
+          <a:xfrm>
+            <a:off x="6094476" y="6089904"/>
+            <a:ext cx="2466129" cy="548640"/>
+          </a:xfrm>
+          <a:prstGeom prst="rect">
+            <a:avLst/>
+          </a:prstGeom>
+          <a:noFill/>
+        </p:spPr>
+        <p:txBody>
+          <a:bodyPr wrap="square" lIns="0" rIns="0" tIns="0" bIns="0">
+            <a:spAutoFit/>
+          </a:bodyPr>
+          <a:lstStyle/>
+          <a:p>
+            <a:pPr algn="ctr"/>
+            <a:r>
+              <a:rPr sz="1150" b="0" i="0">
+                <a:solidFill>
+                  <a:srgbClr val="5A6478"/>
+                </a:solidFill>
+                <a:latin typeface="Calibri"/>
+              </a:rPr>
+              <a:t>Готовая заявка у администратора</a:t>
+            </a:r>
+          </a:p>
+        </p:txBody>
+      </p:sp>
+    </p:spTree>
+  </p:cSld>
+  <p:clrMapOvr>
+    <a:masterClrMapping/>
+  </p:clrMapOvr>
+</p:sld>
+</file>
+
 <file path=ppt/slides/slide2.xml><?xml version="1.0" encoding="utf-8"?>
 <p:sld xmlns:a="http://schemas.openxmlformats.org/drawingml/2006/main" xmlns:r="http://schemas.openxmlformats.org/officeDocument/2006/relationships" xmlns:p="http://schemas.openxmlformats.org/presentationml/2006/main">
   <p:cSld name="Slide 2">
@@ -6662,6 +8068,801 @@
               <a:t>Один и тот же файл готовился и пересылался несколько раз — и всё равно требовал ручной проверки</a:t>
             </a:r>
             <a:endParaRPr lang="en-US" sz="1450" dirty="0"/>
+          </a:p>
+        </p:txBody>
+      </p:sp>
+    </p:spTree>
+  </p:cSld>
+  <p:clrMapOvr>
+    <a:masterClrMapping/>
+  </p:clrMapOvr>
+</p:sld>
+</file>
+
+<file path=ppt/slides/slide20.xml><?xml version="1.0" encoding="utf-8"?>
+<p:sld xmlns:a="http://schemas.openxmlformats.org/drawingml/2006/main" xmlns:p="http://schemas.openxmlformats.org/presentationml/2006/main" xmlns:r="http://schemas.openxmlformats.org/officeDocument/2006/relationships">
+  <p:cSld>
+    <p:spTree>
+      <p:nvGrpSpPr>
+        <p:cNvPr id="1" name=""/>
+        <p:cNvGrpSpPr/>
+        <p:nvPr/>
+      </p:nvGrpSpPr>
+      <p:grpSpPr/>
+      <p:sp>
+        <p:nvSpPr>
+          <p:cNvPr id="2" name="TextBox 1"/>
+          <p:cNvSpPr txBox="1"/>
+          <p:nvPr/>
+        </p:nvSpPr>
+        <p:spPr>
+          <a:xfrm>
+            <a:off x="640080" y="411480"/>
+            <a:ext cx="10881360" cy="685800"/>
+          </a:xfrm>
+          <a:prstGeom prst="rect">
+            <a:avLst/>
+          </a:prstGeom>
+          <a:noFill/>
+        </p:spPr>
+        <p:txBody>
+          <a:bodyPr wrap="square" lIns="0" rIns="0" tIns="0" bIns="0">
+            <a:spAutoFit/>
+          </a:bodyPr>
+          <a:lstStyle/>
+          <a:p>
+            <a:pPr algn="l"/>
+            <a:r>
+              <a:rPr sz="3200" b="1" i="0">
+                <a:solidFill>
+                  <a:srgbClr val="1E2761"/>
+                </a:solidFill>
+                <a:latin typeface="Cambria"/>
+              </a:rPr>
+              <a:t>Приложение: то же самое, но формой</a:t>
+            </a:r>
+          </a:p>
+        </p:txBody>
+      </p:sp>
+      <p:sp>
+        <p:nvSpPr>
+          <p:cNvPr id="3" name="TextBox 2"/>
+          <p:cNvSpPr txBox="1"/>
+          <p:nvPr/>
+        </p:nvSpPr>
+        <p:spPr>
+          <a:xfrm>
+            <a:off x="640080" y="1097280"/>
+            <a:ext cx="10881360" cy="365760"/>
+          </a:xfrm>
+          <a:prstGeom prst="rect">
+            <a:avLst/>
+          </a:prstGeom>
+          <a:noFill/>
+        </p:spPr>
+        <p:txBody>
+          <a:bodyPr wrap="square" lIns="0" rIns="0" tIns="0" bIns="0">
+            <a:spAutoFit/>
+          </a:bodyPr>
+          <a:lstStyle/>
+          <a:p>
+            <a:pPr algn="l"/>
+            <a:r>
+              <a:rPr sz="1500" b="0" i="0">
+                <a:solidFill>
+                  <a:srgbClr val="5A6478"/>
+                </a:solidFill>
+                <a:latin typeface="Calibri"/>
+              </a:rPr>
+              <a:t>Кому удобнее не кнопками в переписке, а привычной формой на экране</a:t>
+            </a:r>
+          </a:p>
+        </p:txBody>
+      </p:sp>
+      <p:pic>
+        <p:nvPicPr>
+          <p:cNvPr id="4" name="Picture 3" descr="photo_19_2026-08-28_16-44-41.jpg"/>
+          <p:cNvPicPr>
+            <a:picLocks noChangeAspect="1"/>
+          </p:cNvPicPr>
+          <p:nvPr/>
+        </p:nvPicPr>
+        <p:blipFill>
+          <a:blip r:embed="rId2"/>
+          <a:stretch>
+            <a:fillRect/>
+          </a:stretch>
+        </p:blipFill>
+        <p:spPr>
+          <a:xfrm>
+            <a:off x="2646741" y="1691640"/>
+            <a:ext cx="1963209" cy="4251960"/>
+          </a:xfrm>
+          <a:prstGeom prst="rect">
+            <a:avLst/>
+          </a:prstGeom>
+        </p:spPr>
+      </p:pic>
+      <p:sp>
+        <p:nvSpPr>
+          <p:cNvPr id="5" name="TextBox 4"/>
+          <p:cNvSpPr txBox="1"/>
+          <p:nvPr/>
+        </p:nvSpPr>
+        <p:spPr>
+          <a:xfrm>
+            <a:off x="2395281" y="6089904"/>
+            <a:ext cx="2466129" cy="548640"/>
+          </a:xfrm>
+          <a:prstGeom prst="rect">
+            <a:avLst/>
+          </a:prstGeom>
+          <a:noFill/>
+        </p:spPr>
+        <p:txBody>
+          <a:bodyPr wrap="square" lIns="0" rIns="0" tIns="0" bIns="0">
+            <a:spAutoFit/>
+          </a:bodyPr>
+          <a:lstStyle/>
+          <a:p>
+            <a:pPr algn="ctr"/>
+            <a:r>
+              <a:rPr sz="1150" b="0" i="0">
+                <a:solidFill>
+                  <a:srgbClr val="5A6478"/>
+                </a:solidFill>
+                <a:latin typeface="Calibri"/>
+              </a:rPr>
+              <a:t>Вход агента</a:t>
+            </a:r>
+          </a:p>
+        </p:txBody>
+      </p:sp>
+      <p:pic>
+        <p:nvPicPr>
+          <p:cNvPr id="6" name="Picture 5" descr="photo_20_2026-08-28_16-44-41.jpg"/>
+          <p:cNvPicPr>
+            <a:picLocks noChangeAspect="1"/>
+          </p:cNvPicPr>
+          <p:nvPr/>
+        </p:nvPicPr>
+        <p:blipFill>
+          <a:blip r:embed="rId3"/>
+          <a:stretch>
+            <a:fillRect/>
+          </a:stretch>
+        </p:blipFill>
+        <p:spPr>
+          <a:xfrm>
+            <a:off x="5112871" y="1691640"/>
+            <a:ext cx="1963209" cy="4251960"/>
+          </a:xfrm>
+          <a:prstGeom prst="rect">
+            <a:avLst/>
+          </a:prstGeom>
+        </p:spPr>
+      </p:pic>
+      <p:sp>
+        <p:nvSpPr>
+          <p:cNvPr id="7" name="TextBox 6"/>
+          <p:cNvSpPr txBox="1"/>
+          <p:nvPr/>
+        </p:nvSpPr>
+        <p:spPr>
+          <a:xfrm>
+            <a:off x="4861411" y="6089904"/>
+            <a:ext cx="2466129" cy="548640"/>
+          </a:xfrm>
+          <a:prstGeom prst="rect">
+            <a:avLst/>
+          </a:prstGeom>
+          <a:noFill/>
+        </p:spPr>
+        <p:txBody>
+          <a:bodyPr wrap="square" lIns="0" rIns="0" tIns="0" bIns="0">
+            <a:spAutoFit/>
+          </a:bodyPr>
+          <a:lstStyle/>
+          <a:p>
+            <a:pPr algn="ctr"/>
+            <a:r>
+              <a:rPr sz="1150" b="0" i="0">
+                <a:solidFill>
+                  <a:srgbClr val="5A6478"/>
+                </a:solidFill>
+                <a:latin typeface="Calibri"/>
+              </a:rPr>
+              <a:t>Проверка точки по ИНН</a:t>
+            </a:r>
+          </a:p>
+        </p:txBody>
+      </p:sp>
+      <p:pic>
+        <p:nvPicPr>
+          <p:cNvPr id="8" name="Picture 7" descr="photo_22_2026-08-28_16-44-41.jpg"/>
+          <p:cNvPicPr>
+            <a:picLocks noChangeAspect="1"/>
+          </p:cNvPicPr>
+          <p:nvPr/>
+        </p:nvPicPr>
+        <p:blipFill>
+          <a:blip r:embed="rId4"/>
+          <a:stretch>
+            <a:fillRect/>
+          </a:stretch>
+        </p:blipFill>
+        <p:spPr>
+          <a:xfrm>
+            <a:off x="7579000" y="1691640"/>
+            <a:ext cx="1963209" cy="4251960"/>
+          </a:xfrm>
+          <a:prstGeom prst="rect">
+            <a:avLst/>
+          </a:prstGeom>
+        </p:spPr>
+      </p:pic>
+      <p:sp>
+        <p:nvSpPr>
+          <p:cNvPr id="9" name="TextBox 8"/>
+          <p:cNvSpPr txBox="1"/>
+          <p:nvPr/>
+        </p:nvSpPr>
+        <p:spPr>
+          <a:xfrm>
+            <a:off x="7327540" y="6089904"/>
+            <a:ext cx="2466129" cy="548640"/>
+          </a:xfrm>
+          <a:prstGeom prst="rect">
+            <a:avLst/>
+          </a:prstGeom>
+          <a:noFill/>
+        </p:spPr>
+        <p:txBody>
+          <a:bodyPr wrap="square" lIns="0" rIns="0" tIns="0" bIns="0">
+            <a:spAutoFit/>
+          </a:bodyPr>
+          <a:lstStyle/>
+          <a:p>
+            <a:pPr algn="ctr"/>
+            <a:r>
+              <a:rPr sz="1150" b="0" i="0">
+                <a:solidFill>
+                  <a:srgbClr val="5A6478"/>
+                </a:solidFill>
+                <a:latin typeface="Calibri"/>
+              </a:rPr>
+              <a:t>Точка занята коллегой по бренду</a:t>
+            </a:r>
+          </a:p>
+        </p:txBody>
+      </p:sp>
+    </p:spTree>
+  </p:cSld>
+  <p:clrMapOvr>
+    <a:masterClrMapping/>
+  </p:clrMapOvr>
+</p:sld>
+</file>
+
+<file path=ppt/slides/slide21.xml><?xml version="1.0" encoding="utf-8"?>
+<p:sld xmlns:a="http://schemas.openxmlformats.org/drawingml/2006/main" xmlns:p="http://schemas.openxmlformats.org/presentationml/2006/main" xmlns:r="http://schemas.openxmlformats.org/officeDocument/2006/relationships">
+  <p:cSld>
+    <p:spTree>
+      <p:nvGrpSpPr>
+        <p:cNvPr id="1" name=""/>
+        <p:cNvGrpSpPr/>
+        <p:nvPr/>
+      </p:nvGrpSpPr>
+      <p:grpSpPr/>
+      <p:sp>
+        <p:nvSpPr>
+          <p:cNvPr id="2" name="TextBox 1"/>
+          <p:cNvSpPr txBox="1"/>
+          <p:nvPr/>
+        </p:nvSpPr>
+        <p:spPr>
+          <a:xfrm>
+            <a:off x="640080" y="411480"/>
+            <a:ext cx="10881360" cy="685800"/>
+          </a:xfrm>
+          <a:prstGeom prst="rect">
+            <a:avLst/>
+          </a:prstGeom>
+          <a:noFill/>
+        </p:spPr>
+        <p:txBody>
+          <a:bodyPr wrap="square" lIns="0" rIns="0" tIns="0" bIns="0">
+            <a:spAutoFit/>
+          </a:bodyPr>
+          <a:lstStyle/>
+          <a:p>
+            <a:pPr algn="l"/>
+            <a:r>
+              <a:rPr sz="3200" b="1" i="0">
+                <a:solidFill>
+                  <a:srgbClr val="1E2761"/>
+                </a:solidFill>
+                <a:latin typeface="Cambria"/>
+              </a:rPr>
+              <a:t>Приложение: регистрация новой точки</a:t>
+            </a:r>
+          </a:p>
+        </p:txBody>
+      </p:sp>
+      <p:sp>
+        <p:nvSpPr>
+          <p:cNvPr id="3" name="TextBox 2"/>
+          <p:cNvSpPr txBox="1"/>
+          <p:nvPr/>
+        </p:nvSpPr>
+        <p:spPr>
+          <a:xfrm>
+            <a:off x="640080" y="1097280"/>
+            <a:ext cx="10881360" cy="365760"/>
+          </a:xfrm>
+          <a:prstGeom prst="rect">
+            <a:avLst/>
+          </a:prstGeom>
+          <a:noFill/>
+        </p:spPr>
+        <p:txBody>
+          <a:bodyPr wrap="square" lIns="0" rIns="0" tIns="0" bIns="0">
+            <a:spAutoFit/>
+          </a:bodyPr>
+          <a:lstStyle/>
+          <a:p>
+            <a:pPr algn="l"/>
+            <a:r>
+              <a:rPr sz="1500" b="0" i="0">
+                <a:solidFill>
+                  <a:srgbClr val="5A6478"/>
+                </a:solidFill>
+                <a:latin typeface="Calibri"/>
+              </a:rPr>
+              <a:t>Проверка названия на дубли, карта для геометки, поиск по справочникам</a:t>
+            </a:r>
+          </a:p>
+        </p:txBody>
+      </p:sp>
+      <p:pic>
+        <p:nvPicPr>
+          <p:cNvPr id="4" name="Picture 3" descr="photo_23_2026-08-28_16-44-41.jpg"/>
+          <p:cNvPicPr>
+            <a:picLocks noChangeAspect="1"/>
+          </p:cNvPicPr>
+          <p:nvPr/>
+        </p:nvPicPr>
+        <p:blipFill>
+          <a:blip r:embed="rId2"/>
+          <a:stretch>
+            <a:fillRect/>
+          </a:stretch>
+        </p:blipFill>
+        <p:spPr>
+          <a:xfrm>
+            <a:off x="2646741" y="1691640"/>
+            <a:ext cx="1963209" cy="4251960"/>
+          </a:xfrm>
+          <a:prstGeom prst="rect">
+            <a:avLst/>
+          </a:prstGeom>
+        </p:spPr>
+      </p:pic>
+      <p:sp>
+        <p:nvSpPr>
+          <p:cNvPr id="5" name="TextBox 4"/>
+          <p:cNvSpPr txBox="1"/>
+          <p:nvPr/>
+        </p:nvSpPr>
+        <p:spPr>
+          <a:xfrm>
+            <a:off x="2395281" y="6089904"/>
+            <a:ext cx="2466129" cy="548640"/>
+          </a:xfrm>
+          <a:prstGeom prst="rect">
+            <a:avLst/>
+          </a:prstGeom>
+          <a:noFill/>
+        </p:spPr>
+        <p:txBody>
+          <a:bodyPr wrap="square" lIns="0" rIns="0" tIns="0" bIns="0">
+            <a:spAutoFit/>
+          </a:bodyPr>
+          <a:lstStyle/>
+          <a:p>
+            <a:pPr algn="ctr"/>
+            <a:r>
+              <a:rPr sz="1150" b="0" i="0">
+                <a:solidFill>
+                  <a:srgbClr val="5A6478"/>
+                </a:solidFill>
+                <a:latin typeface="Calibri"/>
+              </a:rPr>
+              <a:t>Форма новой точки</a:t>
+            </a:r>
+          </a:p>
+        </p:txBody>
+      </p:sp>
+      <p:pic>
+        <p:nvPicPr>
+          <p:cNvPr id="6" name="Picture 5" descr="photo_24_2026-08-28_16-44-41.jpg"/>
+          <p:cNvPicPr>
+            <a:picLocks noChangeAspect="1"/>
+          </p:cNvPicPr>
+          <p:nvPr/>
+        </p:nvPicPr>
+        <p:blipFill>
+          <a:blip r:embed="rId3"/>
+          <a:stretch>
+            <a:fillRect/>
+          </a:stretch>
+        </p:blipFill>
+        <p:spPr>
+          <a:xfrm>
+            <a:off x="5112871" y="1691640"/>
+            <a:ext cx="1963209" cy="4251960"/>
+          </a:xfrm>
+          <a:prstGeom prst="rect">
+            <a:avLst/>
+          </a:prstGeom>
+        </p:spPr>
+      </p:pic>
+      <p:sp>
+        <p:nvSpPr>
+          <p:cNvPr id="7" name="TextBox 6"/>
+          <p:cNvSpPr txBox="1"/>
+          <p:nvPr/>
+        </p:nvSpPr>
+        <p:spPr>
+          <a:xfrm>
+            <a:off x="4861411" y="6089904"/>
+            <a:ext cx="2466129" cy="548640"/>
+          </a:xfrm>
+          <a:prstGeom prst="rect">
+            <a:avLst/>
+          </a:prstGeom>
+          <a:noFill/>
+        </p:spPr>
+        <p:txBody>
+          <a:bodyPr wrap="square" lIns="0" rIns="0" tIns="0" bIns="0">
+            <a:spAutoFit/>
+          </a:bodyPr>
+          <a:lstStyle/>
+          <a:p>
+            <a:pPr algn="ctr"/>
+            <a:r>
+              <a:rPr sz="1150" b="0" i="0">
+                <a:solidFill>
+                  <a:srgbClr val="5A6478"/>
+                </a:solidFill>
+                <a:latin typeface="Calibri"/>
+              </a:rPr>
+              <a:t>Найдено похожее название</a:t>
+            </a:r>
+          </a:p>
+        </p:txBody>
+      </p:sp>
+      <p:pic>
+        <p:nvPicPr>
+          <p:cNvPr id="8" name="Picture 7" descr="photo_26_2026-08-28_16-44-41.jpg"/>
+          <p:cNvPicPr>
+            <a:picLocks noChangeAspect="1"/>
+          </p:cNvPicPr>
+          <p:nvPr/>
+        </p:nvPicPr>
+        <p:blipFill>
+          <a:blip r:embed="rId4"/>
+          <a:stretch>
+            <a:fillRect/>
+          </a:stretch>
+        </p:blipFill>
+        <p:spPr>
+          <a:xfrm>
+            <a:off x="7579000" y="1691640"/>
+            <a:ext cx="1963209" cy="4251960"/>
+          </a:xfrm>
+          <a:prstGeom prst="rect">
+            <a:avLst/>
+          </a:prstGeom>
+        </p:spPr>
+      </p:pic>
+      <p:sp>
+        <p:nvSpPr>
+          <p:cNvPr id="9" name="TextBox 8"/>
+          <p:cNvSpPr txBox="1"/>
+          <p:nvPr/>
+        </p:nvSpPr>
+        <p:spPr>
+          <a:xfrm>
+            <a:off x="7327540" y="6089904"/>
+            <a:ext cx="2466129" cy="548640"/>
+          </a:xfrm>
+          <a:prstGeom prst="rect">
+            <a:avLst/>
+          </a:prstGeom>
+          <a:noFill/>
+        </p:spPr>
+        <p:txBody>
+          <a:bodyPr wrap="square" lIns="0" rIns="0" tIns="0" bIns="0">
+            <a:spAutoFit/>
+          </a:bodyPr>
+          <a:lstStyle/>
+          <a:p>
+            <a:pPr algn="ctr"/>
+            <a:r>
+              <a:rPr sz="1150" b="0" i="0">
+                <a:solidFill>
+                  <a:srgbClr val="5A6478"/>
+                </a:solidFill>
+                <a:latin typeface="Calibri"/>
+              </a:rPr>
+              <a:t>Поиск по 213 районам</a:t>
+            </a:r>
+          </a:p>
+        </p:txBody>
+      </p:sp>
+    </p:spTree>
+  </p:cSld>
+  <p:clrMapOvr>
+    <a:masterClrMapping/>
+  </p:clrMapOvr>
+</p:sld>
+</file>
+
+<file path=ppt/slides/slide22.xml><?xml version="1.0" encoding="utf-8"?>
+<p:sld xmlns:a="http://schemas.openxmlformats.org/drawingml/2006/main" xmlns:p="http://schemas.openxmlformats.org/presentationml/2006/main" xmlns:r="http://schemas.openxmlformats.org/officeDocument/2006/relationships">
+  <p:cSld>
+    <p:spTree>
+      <p:nvGrpSpPr>
+        <p:cNvPr id="1" name=""/>
+        <p:cNvGrpSpPr/>
+        <p:nvPr/>
+      </p:nvGrpSpPr>
+      <p:grpSpPr/>
+      <p:sp>
+        <p:nvSpPr>
+          <p:cNvPr id="2" name="TextBox 1"/>
+          <p:cNvSpPr txBox="1"/>
+          <p:nvPr/>
+        </p:nvSpPr>
+        <p:spPr>
+          <a:xfrm>
+            <a:off x="640080" y="411480"/>
+            <a:ext cx="10881360" cy="685800"/>
+          </a:xfrm>
+          <a:prstGeom prst="rect">
+            <a:avLst/>
+          </a:prstGeom>
+          <a:noFill/>
+        </p:spPr>
+        <p:txBody>
+          <a:bodyPr wrap="square" lIns="0" rIns="0" tIns="0" bIns="0">
+            <a:spAutoFit/>
+          </a:bodyPr>
+          <a:lstStyle/>
+          <a:p>
+            <a:pPr algn="l"/>
+            <a:r>
+              <a:rPr sz="3200" b="1" i="0">
+                <a:solidFill>
+                  <a:srgbClr val="1E2761"/>
+                </a:solidFill>
+                <a:latin typeface="Cambria"/>
+              </a:rPr>
+              <a:t>Приложение: завершение заявки</a:t>
+            </a:r>
+          </a:p>
+        </p:txBody>
+      </p:sp>
+      <p:sp>
+        <p:nvSpPr>
+          <p:cNvPr id="3" name="TextBox 2"/>
+          <p:cNvSpPr txBox="1"/>
+          <p:nvPr/>
+        </p:nvSpPr>
+        <p:spPr>
+          <a:xfrm>
+            <a:off x="640080" y="1097280"/>
+            <a:ext cx="10881360" cy="365760"/>
+          </a:xfrm>
+          <a:prstGeom prst="rect">
+            <a:avLst/>
+          </a:prstGeom>
+          <a:noFill/>
+        </p:spPr>
+        <p:txBody>
+          <a:bodyPr wrap="square" lIns="0" rIns="0" tIns="0" bIns="0">
+            <a:spAutoFit/>
+          </a:bodyPr>
+          <a:lstStyle/>
+          <a:p>
+            <a:pPr algn="l"/>
+            <a:r>
+              <a:rPr sz="1500" b="0" i="0">
+                <a:solidFill>
+                  <a:srgbClr val="5A6478"/>
+                </a:solidFill>
+                <a:latin typeface="Calibri"/>
+              </a:rPr>
+              <a:t>Дни визита, отправка и та же карточка администратору</a:t>
+            </a:r>
+          </a:p>
+        </p:txBody>
+      </p:sp>
+      <p:pic>
+        <p:nvPicPr>
+          <p:cNvPr id="4" name="Picture 3" descr="photo_28_2026-08-28_16-44-41.jpg"/>
+          <p:cNvPicPr>
+            <a:picLocks noChangeAspect="1"/>
+          </p:cNvPicPr>
+          <p:nvPr/>
+        </p:nvPicPr>
+        <p:blipFill>
+          <a:blip r:embed="rId2"/>
+          <a:stretch>
+            <a:fillRect/>
+          </a:stretch>
+        </p:blipFill>
+        <p:spPr>
+          <a:xfrm>
+            <a:off x="2646741" y="1691640"/>
+            <a:ext cx="1963209" cy="4251960"/>
+          </a:xfrm>
+          <a:prstGeom prst="rect">
+            <a:avLst/>
+          </a:prstGeom>
+        </p:spPr>
+      </p:pic>
+      <p:sp>
+        <p:nvSpPr>
+          <p:cNvPr id="5" name="TextBox 4"/>
+          <p:cNvSpPr txBox="1"/>
+          <p:nvPr/>
+        </p:nvSpPr>
+        <p:spPr>
+          <a:xfrm>
+            <a:off x="2395281" y="6089904"/>
+            <a:ext cx="2466129" cy="548640"/>
+          </a:xfrm>
+          <a:prstGeom prst="rect">
+            <a:avLst/>
+          </a:prstGeom>
+          <a:noFill/>
+        </p:spPr>
+        <p:txBody>
+          <a:bodyPr wrap="square" lIns="0" rIns="0" tIns="0" bIns="0">
+            <a:spAutoFit/>
+          </a:bodyPr>
+          <a:lstStyle/>
+          <a:p>
+            <a:pPr algn="ctr"/>
+            <a:r>
+              <a:rPr sz="1150" b="0" i="0">
+                <a:solidFill>
+                  <a:srgbClr val="5A6478"/>
+                </a:solidFill>
+                <a:latin typeface="Calibri"/>
+              </a:rPr>
+              <a:t>Код доставщика и дни визита</a:t>
+            </a:r>
+          </a:p>
+        </p:txBody>
+      </p:sp>
+      <p:pic>
+        <p:nvPicPr>
+          <p:cNvPr id="6" name="Picture 5" descr="photo_29_2026-08-28_16-44-41.jpg"/>
+          <p:cNvPicPr>
+            <a:picLocks noChangeAspect="1"/>
+          </p:cNvPicPr>
+          <p:nvPr/>
+        </p:nvPicPr>
+        <p:blipFill>
+          <a:blip r:embed="rId3"/>
+          <a:stretch>
+            <a:fillRect/>
+          </a:stretch>
+        </p:blipFill>
+        <p:spPr>
+          <a:xfrm>
+            <a:off x="5112871" y="1691640"/>
+            <a:ext cx="1963209" cy="4251960"/>
+          </a:xfrm>
+          <a:prstGeom prst="rect">
+            <a:avLst/>
+          </a:prstGeom>
+        </p:spPr>
+      </p:pic>
+      <p:sp>
+        <p:nvSpPr>
+          <p:cNvPr id="7" name="TextBox 6"/>
+          <p:cNvSpPr txBox="1"/>
+          <p:nvPr/>
+        </p:nvSpPr>
+        <p:spPr>
+          <a:xfrm>
+            <a:off x="4861411" y="6089904"/>
+            <a:ext cx="2466129" cy="548640"/>
+          </a:xfrm>
+          <a:prstGeom prst="rect">
+            <a:avLst/>
+          </a:prstGeom>
+          <a:noFill/>
+        </p:spPr>
+        <p:txBody>
+          <a:bodyPr wrap="square" lIns="0" rIns="0" tIns="0" bIns="0">
+            <a:spAutoFit/>
+          </a:bodyPr>
+          <a:lstStyle/>
+          <a:p>
+            <a:pPr algn="ctr"/>
+            <a:r>
+              <a:rPr sz="1150" b="0" i="0">
+                <a:solidFill>
+                  <a:srgbClr val="5A6478"/>
+                </a:solidFill>
+                <a:latin typeface="Calibri"/>
+              </a:rPr>
+              <a:t>Точка добавлена</a:t>
+            </a:r>
+          </a:p>
+        </p:txBody>
+      </p:sp>
+      <p:pic>
+        <p:nvPicPr>
+          <p:cNvPr id="8" name="Picture 7" descr="photo_30_2026-08-28_16-44-41.jpg"/>
+          <p:cNvPicPr>
+            <a:picLocks noChangeAspect="1"/>
+          </p:cNvPicPr>
+          <p:nvPr/>
+        </p:nvPicPr>
+        <p:blipFill>
+          <a:blip r:embed="rId4"/>
+          <a:stretch>
+            <a:fillRect/>
+          </a:stretch>
+        </p:blipFill>
+        <p:spPr>
+          <a:xfrm>
+            <a:off x="7579000" y="1691640"/>
+            <a:ext cx="1963209" cy="4251960"/>
+          </a:xfrm>
+          <a:prstGeom prst="rect">
+            <a:avLst/>
+          </a:prstGeom>
+        </p:spPr>
+      </p:pic>
+      <p:sp>
+        <p:nvSpPr>
+          <p:cNvPr id="9" name="TextBox 8"/>
+          <p:cNvSpPr txBox="1"/>
+          <p:nvPr/>
+        </p:nvSpPr>
+        <p:spPr>
+          <a:xfrm>
+            <a:off x="7327540" y="6089904"/>
+            <a:ext cx="2466129" cy="548640"/>
+          </a:xfrm>
+          <a:prstGeom prst="rect">
+            <a:avLst/>
+          </a:prstGeom>
+          <a:noFill/>
+        </p:spPr>
+        <p:txBody>
+          <a:bodyPr wrap="square" lIns="0" rIns="0" tIns="0" bIns="0">
+            <a:spAutoFit/>
+          </a:bodyPr>
+          <a:lstStyle/>
+          <a:p>
+            <a:pPr algn="ctr"/>
+            <a:r>
+              <a:rPr sz="1150" b="0" i="0">
+                <a:solidFill>
+                  <a:srgbClr val="5A6478"/>
+                </a:solidFill>
+                <a:latin typeface="Calibri"/>
+              </a:rPr>
+              <a:t>Заявка у администратора</a:t>
+            </a:r>
           </a:p>
         </p:txBody>
       </p:sp>
